--- a/slides/slide_16.pptx
+++ b/slides/slide_16.pptx
@@ -26,61 +26,38 @@
       <p:bold r:id="rId9"/>
     </p:embeddedFont>
     <p:embeddedFont>
-      <p:font typeface="Bebas Neue" panose="020B0606020202050201" pitchFamily="2" charset="0"/>
+      <p:font typeface="Hanken Grotesk" panose="020B0604020202020204" charset="0"/>
       <p:regular r:id="rId10"/>
-    </p:embeddedFont>
-    <p:embeddedFont>
-      <p:font typeface="DM Mono" panose="020B0509040201040103" pitchFamily="1" charset="0"/>
-      <p:regular r:id="rId11"/>
+      <p:bold r:id="rId11"/>
       <p:italic r:id="rId12"/>
-    </p:embeddedFont>
-    <p:embeddedFont>
-      <p:font typeface="Hanken Grotesk" panose="020B0604020202020204" charset="0"/>
-      <p:regular r:id="rId13"/>
-      <p:bold r:id="rId14"/>
-      <p:italic r:id="rId15"/>
-      <p:boldItalic r:id="rId16"/>
-    </p:embeddedFont>
-    <p:embeddedFont>
-      <p:font typeface="Open Sans" panose="020B0606030504020204" pitchFamily="2" charset="0"/>
-      <p:regular r:id="rId17"/>
-      <p:bold r:id="rId18"/>
-      <p:italic r:id="rId19"/>
-      <p:boldItalic r:id="rId20"/>
+      <p:boldItalic r:id="rId13"/>
     </p:embeddedFont>
     <p:embeddedFont>
       <p:font typeface="Raleway" pitchFamily="2" charset="0"/>
-      <p:regular r:id="rId21"/>
-      <p:bold r:id="rId22"/>
-      <p:italic r:id="rId23"/>
-      <p:boldItalic r:id="rId24"/>
+      <p:regular r:id="rId14"/>
+      <p:bold r:id="rId15"/>
+      <p:italic r:id="rId16"/>
+      <p:boldItalic r:id="rId17"/>
     </p:embeddedFont>
     <p:embeddedFont>
       <p:font typeface="Raleway Black" pitchFamily="2" charset="0"/>
-      <p:bold r:id="rId25"/>
-      <p:boldItalic r:id="rId26"/>
+      <p:bold r:id="rId18"/>
+      <p:boldItalic r:id="rId19"/>
     </p:embeddedFont>
     <p:embeddedFont>
       <p:font typeface="Raleway ExtraBold" pitchFamily="2" charset="0"/>
-      <p:bold r:id="rId27"/>
-      <p:boldItalic r:id="rId28"/>
+      <p:bold r:id="rId20"/>
+      <p:boldItalic r:id="rId21"/>
     </p:embeddedFont>
     <p:embeddedFont>
       <p:font typeface="Roboto Medium" panose="02000000000000000000" pitchFamily="2" charset="0"/>
-      <p:regular r:id="rId29"/>
-      <p:italic r:id="rId30"/>
+      <p:regular r:id="rId22"/>
+      <p:italic r:id="rId23"/>
     </p:embeddedFont>
     <p:embeddedFont>
       <p:font typeface="Roboto" panose="02000000000000000000" pitchFamily="2"/>
-      <p:bold r:id="rId31"/>
-      <p:boldItalic r:id="rId32"/>
-    </p:embeddedFont>
-    <p:embeddedFont>
-      <p:font typeface="Segoe UI" panose="020B0502040204020203" pitchFamily="2" charset="0"/>
-      <p:regular r:id="rId33"/>
-      <p:bold r:id="rId34"/>
-      <p:italic r:id="rId35"/>
-      <p:boldItalic r:id="rId36"/>
+      <p:bold r:id="rId24"/>
+      <p:boldItalic r:id="rId25"/>
     </p:embeddedFont>
   </p:embeddedFontLst>
   <p:custDataLst>
@@ -884,7 +861,7 @@
           <a:bodyPr/>
           <a:lstStyle/>
           <a:p>
-            <a:fld id="{9C038229-E2E1-449C-9248-B312181EA5C2}" type="datetimeFigureOut">
+            <a:fld id="{54FFD863-1413-4FF1-B4F2-B83989DA28E8}" type="datetimeFigureOut">
               <a:rPr lang="en-US" smtClean="0"/>
               <a:t>11/7/2009</a:t>
             </a:fld>
@@ -1048,7 +1025,7 @@
           <a:bodyPr/>
           <a:lstStyle/>
           <a:p>
-            <a:fld id="{0A8ACED7-0AFB-4CD1-8DA1-AD63155AD27D}" type="datetimeFigureOut">
+            <a:fld id="{6F234F78-F343-4A13-9747-0648824B1228}" type="datetimeFigureOut">
               <a:rPr lang="en-US" smtClean="0"/>
               <a:t>11/7/2009</a:t>
             </a:fld>
@@ -1212,7 +1189,7 @@
           <a:bodyPr/>
           <a:lstStyle/>
           <a:p>
-            <a:fld id="{3C2113B0-DC1F-42F6-843B-CC33D2ED4F46}" type="datetimeFigureOut">
+            <a:fld id="{370DBA32-05DA-4235-B49C-18C0D64E7DF2}" type="datetimeFigureOut">
               <a:rPr lang="en-US" smtClean="0"/>
               <a:t>11/7/2009</a:t>
             </a:fld>
@@ -13117,7 +13094,7 @@
           <a:bodyPr/>
           <a:lstStyle/>
           <a:p>
-            <a:fld id="{F4C337E5-957A-4A50-9D5D-58DD25910E98}" type="datetimeFigureOut">
+            <a:fld id="{2B51AF16-CE20-4B9A-9C9E-04169F777C48}" type="datetimeFigureOut">
               <a:rPr lang="en-US" smtClean="0"/>
               <a:t>11/7/2009</a:t>
             </a:fld>
@@ -33218,7 +33195,7 @@
           <a:bodyPr/>
           <a:lstStyle/>
           <a:p>
-            <a:fld id="{119147EC-8730-45FA-92B2-BF8421B80F34}" type="datetimeFigureOut">
+            <a:fld id="{58BEEA77-8571-4FCB-A992-7E38676C915E}" type="datetimeFigureOut">
               <a:rPr lang="en-US" smtClean="0"/>
               <a:t>11/7/2009</a:t>
             </a:fld>
@@ -38865,7 +38842,7 @@
           <a:bodyPr/>
           <a:lstStyle/>
           <a:p>
-            <a:fld id="{61C3AFB1-F98B-49A8-B2A5-34B4723E5438}" type="datetimeFigureOut">
+            <a:fld id="{8E242F21-76DD-44B0-A1B6-0360ABDBEED7}" type="datetimeFigureOut">
               <a:rPr lang="en-US" smtClean="0"/>
               <a:t>11/7/2009</a:t>
             </a:fld>
@@ -39254,7 +39231,7 @@
           <a:bodyPr/>
           <a:lstStyle/>
           <a:p>
-            <a:fld id="{D9A3875D-DFDD-4E04-8E88-666DD7E88588}" type="datetimeFigureOut">
+            <a:fld id="{1B949960-71A0-4486-ADAA-758D3819141F}" type="datetimeFigureOut">
               <a:rPr lang="en-US" smtClean="0"/>
               <a:t>11/7/2009</a:t>
             </a:fld>
@@ -39367,7 +39344,7 @@
           <a:bodyPr/>
           <a:lstStyle/>
           <a:p>
-            <a:fld id="{0A25CAC3-D1BC-4477-BC3E-E70FAC515EB7}" type="datetimeFigureOut">
+            <a:fld id="{3F295610-7C31-4308-9926-3A03909F8C25}" type="datetimeFigureOut">
               <a:rPr lang="en-US" smtClean="0"/>
               <a:t>11/7/2009</a:t>
             </a:fld>
@@ -39457,7 +39434,7 @@
           <a:bodyPr/>
           <a:lstStyle/>
           <a:p>
-            <a:fld id="{29B60631-DCDE-4F90-BC17-4EE4AE131F4F}" type="datetimeFigureOut">
+            <a:fld id="{9800A927-B10C-4C7F-B179-E47CEC902D7A}" type="datetimeFigureOut">
               <a:rPr lang="en-US" smtClean="0"/>
               <a:t>11/7/2009</a:t>
             </a:fld>
@@ -39712,7 +39689,7 @@
           <a:bodyPr/>
           <a:lstStyle/>
           <a:p>
-            <a:fld id="{DD0523E0-F407-4548-B3DC-AFB9CFFC830D}" type="datetimeFigureOut">
+            <a:fld id="{70B37EB3-2A26-4DCB-9270-08D740659187}" type="datetimeFigureOut">
               <a:rPr lang="en-US" smtClean="0"/>
               <a:t>11/7/2009</a:t>
             </a:fld>
@@ -39944,7 +39921,7 @@
           <a:bodyPr/>
           <a:lstStyle/>
           <a:p>
-            <a:fld id="{5A355B5C-73CD-4425-A55C-AEF4FF03B878}" type="datetimeFigureOut">
+            <a:fld id="{6B6B10A9-43C2-4106-9DF7-FADF2648FE02}" type="datetimeFigureOut">
               <a:rPr lang="en-US" smtClean="0"/>
               <a:t>11/7/2009</a:t>
             </a:fld>
@@ -41804,19 +41781,17 @@
           <a:lstStyle/>
           <a:p>
             <a:r>
-              <a:rPr lang="en">
+              <a:rPr lang="en" b="1">
                 <a:solidFill>
                   <a:srgbClr val="FFFFFF"/>
                 </a:solidFill>
+                <a:latin typeface="Arial"/>
+                <a:cs typeface="Arial"/>
               </a:rPr>
               <a:t>(KPI-дашборд)</a:t>
             </a:r>
             <a:br>
-              <a:rPr lang="en">
-                <a:solidFill>
-                  <a:srgbClr val="FFFFFF"/>
-                </a:solidFill>
-              </a:rPr>
+              <a:rPr lang="en"/>
             </a:br>
             <a:endParaRPr lang="en"/>
           </a:p>
@@ -41831,14 +41806,14 @@
           <p:nvPr>
             <p:extLst>
               <p:ext uri="{D42A27DB-BD31-4B8C-83A1-F6EECF244321}">
-                <p14:modId val="44474119"/>
+                <p14:modId val="713502664"/>
               </p:ext>
             </p:extLst>
           </p:nvPr>
         </p:nvGraphicFramePr>
         <p:xfrm>
           <a:off x="720000" y="1186325"/>
-          <a:ext cx="3435291" cy="3523650"/>
+          <a:ext cx="3435263" cy="3417725"/>
         </p:xfrm>
         <a:graphic>
           <a:graphicData uri="http://schemas.openxmlformats.org/drawingml/2006/table">
@@ -41848,21 +41823,21 @@
                 <a:tableStyleId>{DAF19E55-1936-451E-A299-2CC021112DF1}</a:tableStyleId>
               </a:tblPr>
               <a:tblGrid>
-                <a:gridCol w="648268">
+                <a:gridCol w="639738">
                   <a:extLst>
                     <a:ext uri="{9D8B030D-6E8A-4147-A177-3AD203B41FA5}">
                       <a16:colId xmlns:a16="http://schemas.microsoft.com/office/drawing/2014/main" val="20000"/>
                     </a:ext>
                   </a:extLst>
                 </a:gridCol>
-                <a:gridCol w="1074753">
+                <a:gridCol w="1074750">
                   <a:extLst>
                     <a:ext uri="{9D8B030D-6E8A-4147-A177-3AD203B41FA5}">
                       <a16:colId xmlns:a16="http://schemas.microsoft.com/office/drawing/2014/main" val="20001"/>
                     </a:ext>
                   </a:extLst>
                 </a:gridCol>
-                <a:gridCol w="818855">
+                <a:gridCol w="827360">
                   <a:extLst>
                     <a:ext uri="{9D8B030D-6E8A-4147-A177-3AD203B41FA5}">
                       <a16:colId xmlns:a16="http://schemas.microsoft.com/office/drawing/2014/main" val="20002"/>
@@ -41893,23 +41868,23 @@
                         <a:buNone/>
                       </a:pPr>
                       <a:r>
-                        <a:rPr lang="en" sz="1000">
+                        <a:rPr lang="en" sz="1000" b="1">
                           <a:solidFill>
                             <a:schemeClr val="dk1"/>
                           </a:solidFill>
-                          <a:latin typeface="Raleway ExtraBold"/>
+                          <a:latin typeface="Arial"/>
                           <a:ea typeface="Raleway ExtraBold"/>
-                          <a:cs typeface="Raleway ExtraBold"/>
+                          <a:cs typeface="Arial"/>
                         </a:rPr>
                         <a:t>ТОВАР</a:t>
                       </a:r>
-                      <a:endParaRPr lang="en" sz="1000">
+                      <a:endParaRPr lang="en" sz="1000" b="1">
                         <a:solidFill>
                           <a:schemeClr val="dk1"/>
                         </a:solidFill>
-                        <a:latin typeface="Raleway ExtraBold"/>
+                        <a:latin typeface="Arial"/>
                         <a:ea typeface="Raleway ExtraBold"/>
-                        <a:cs typeface="Raleway ExtraBold"/>
+                        <a:cs typeface="Arial"/>
                         <a:sym typeface="Raleway ExtraBold"/>
                       </a:endParaRPr>
                     </a:p>
@@ -41973,23 +41948,23 @@
                         <a:buNone/>
                       </a:pPr>
                       <a:r>
-                        <a:rPr lang="en" sz="1000">
+                        <a:rPr lang="en" sz="1000" b="1">
                           <a:solidFill>
                             <a:schemeClr val="dk1"/>
                           </a:solidFill>
-                          <a:latin typeface="Raleway ExtraBold"/>
+                          <a:latin typeface="Arial"/>
                           <a:ea typeface="Raleway ExtraBold"/>
-                          <a:cs typeface="Raleway ExtraBold"/>
+                          <a:cs typeface="Arial"/>
                         </a:rPr>
                         <a:t>КОЛИЧЕСТВО</a:t>
                       </a:r>
-                      <a:endParaRPr lang="en" sz="1000">
+                      <a:endParaRPr lang="en" sz="1000" b="1">
                         <a:solidFill>
                           <a:schemeClr val="dk1"/>
                         </a:solidFill>
-                        <a:latin typeface="Raleway ExtraBold"/>
+                        <a:latin typeface="Arial"/>
                         <a:ea typeface="Raleway ExtraBold"/>
-                        <a:cs typeface="Raleway ExtraBold"/>
+                        <a:cs typeface="Arial"/>
                         <a:sym typeface="Raleway ExtraBold"/>
                       </a:endParaRPr>
                     </a:p>
@@ -42053,23 +42028,23 @@
                         <a:buNone/>
                       </a:pPr>
                       <a:r>
-                        <a:rPr lang="en" sz="1000">
+                        <a:rPr lang="en" sz="1000" b="1">
                           <a:solidFill>
                             <a:schemeClr val="dk1"/>
                           </a:solidFill>
-                          <a:latin typeface="Raleway ExtraBold"/>
+                          <a:latin typeface="Arial"/>
                           <a:ea typeface="Raleway ExtraBold"/>
-                          <a:cs typeface="Raleway ExtraBold"/>
+                          <a:cs typeface="Arial"/>
                         </a:rPr>
                         <a:t>ВЫРУЧКА</a:t>
                       </a:r>
-                      <a:endParaRPr lang="en" sz="1000">
+                      <a:endParaRPr lang="en" sz="1000" b="1">
                         <a:solidFill>
                           <a:schemeClr val="dk1"/>
                         </a:solidFill>
-                        <a:latin typeface="Raleway ExtraBold"/>
+                        <a:latin typeface="Arial"/>
                         <a:ea typeface="Raleway ExtraBold"/>
-                        <a:cs typeface="Raleway ExtraBold"/>
+                        <a:cs typeface="Arial"/>
                         <a:sym typeface="Raleway ExtraBold"/>
                       </a:endParaRPr>
                     </a:p>
@@ -42133,23 +42108,23 @@
                         <a:buNone/>
                       </a:pPr>
                       <a:r>
-                        <a:rPr lang="en" sz="1000">
+                        <a:rPr lang="en" sz="1000" b="1">
                           <a:solidFill>
                             <a:schemeClr val="dk1"/>
                           </a:solidFill>
-                          <a:latin typeface="Raleway ExtraBold"/>
+                          <a:latin typeface="Arial"/>
                           <a:ea typeface="Raleway ExtraBold"/>
-                          <a:cs typeface="Raleway ExtraBold"/>
+                          <a:cs typeface="Arial"/>
                         </a:rPr>
-                        <a:t>ВОЗВРАТЫ</a:t>
+                        <a:t>ВОЗВРАТ</a:t>
                       </a:r>
-                      <a:endParaRPr lang="en" sz="1000">
+                      <a:endParaRPr lang="en" sz="1000" b="1">
                         <a:solidFill>
                           <a:schemeClr val="dk1"/>
                         </a:solidFill>
-                        <a:latin typeface="Raleway ExtraBold"/>
+                        <a:latin typeface="Arial"/>
                         <a:ea typeface="Raleway ExtraBold"/>
-                        <a:cs typeface="Raleway ExtraBold"/>
+                        <a:cs typeface="Arial"/>
                         <a:sym typeface="Raleway ExtraBold"/>
                       </a:endParaRPr>
                     </a:p>
@@ -42224,9 +42199,9 @@
                           <a:solidFill>
                             <a:schemeClr val="dk1"/>
                           </a:solidFill>
-                          <a:latin typeface="Hanken Grotesk"/>
+                          <a:latin typeface="Arial"/>
                           <a:ea typeface="Hanken Grotesk"/>
-                          <a:cs typeface="Hanken Grotesk"/>
+                          <a:cs typeface="Arial"/>
                         </a:rPr>
                         <a:t>Товар </a:t>
                       </a:r>
@@ -42235,9 +42210,9 @@
                           <a:solidFill>
                             <a:schemeClr val="dk1"/>
                           </a:solidFill>
-                          <a:latin typeface="Hanken Grotesk"/>
+                          <a:latin typeface="Arial"/>
                           <a:ea typeface="Hanken Grotesk"/>
-                          <a:cs typeface="Hanken Grotesk"/>
+                          <a:cs typeface="Arial"/>
                         </a:rPr>
                         <a:t>1</a:t>
                       </a:r>
@@ -42245,9 +42220,9 @@
                         <a:solidFill>
                           <a:schemeClr val="dk1"/>
                         </a:solidFill>
-                        <a:latin typeface="Hanken Grotesk"/>
+                        <a:latin typeface="Arial"/>
                         <a:ea typeface="Hanken Grotesk"/>
-                        <a:cs typeface="Hanken Grotesk"/>
+                        <a:cs typeface="Arial"/>
                         <a:sym typeface="Hanken Grotesk"/>
                       </a:endParaRPr>
                     </a:p>
@@ -42313,9 +42288,9 @@
                           <a:solidFill>
                             <a:schemeClr val="dk1"/>
                           </a:solidFill>
-                          <a:latin typeface="Hanken Grotesk"/>
+                          <a:latin typeface="Arial"/>
                           <a:ea typeface="Hanken Grotesk"/>
-                          <a:cs typeface="Hanken Grotesk"/>
+                          <a:cs typeface="Arial"/>
                           <a:sym typeface="Hanken Grotesk"/>
                         </a:rPr>
                         <a:t>500</a:t>
@@ -42324,9 +42299,9 @@
                         <a:solidFill>
                           <a:schemeClr val="dk1"/>
                         </a:solidFill>
-                        <a:latin typeface="Hanken Grotesk"/>
+                        <a:latin typeface="Arial"/>
                         <a:ea typeface="Hanken Grotesk"/>
-                        <a:cs typeface="Hanken Grotesk"/>
+                        <a:cs typeface="Arial"/>
                         <a:sym typeface="Hanken Grotesk"/>
                       </a:endParaRPr>
                     </a:p>
@@ -42392,9 +42367,9 @@
                           <a:solidFill>
                             <a:schemeClr val="dk1"/>
                           </a:solidFill>
-                          <a:latin typeface="Hanken Grotesk"/>
+                          <a:latin typeface="Arial"/>
                           <a:ea typeface="Hanken Grotesk"/>
-                          <a:cs typeface="Hanken Grotesk"/>
+                          <a:cs typeface="Arial"/>
                         </a:rPr>
                         <a:t>2,000,000</a:t>
                       </a:r>
@@ -42402,9 +42377,9 @@
                         <a:solidFill>
                           <a:schemeClr val="dk1"/>
                         </a:solidFill>
-                        <a:latin typeface="Hanken Grotesk"/>
+                        <a:latin typeface="Arial"/>
                         <a:ea typeface="Hanken Grotesk"/>
-                        <a:cs typeface="Hanken Grotesk"/>
+                        <a:cs typeface="Arial"/>
                         <a:sym typeface="Hanken Grotesk"/>
                       </a:endParaRPr>
                     </a:p>
@@ -42470,9 +42445,9 @@
                           <a:solidFill>
                             <a:schemeClr val="dk1"/>
                           </a:solidFill>
-                          <a:latin typeface="Hanken Grotesk"/>
+                          <a:latin typeface="Arial"/>
                           <a:ea typeface="Hanken Grotesk"/>
-                          <a:cs typeface="Hanken Grotesk"/>
+                          <a:cs typeface="Arial"/>
                         </a:rPr>
                         <a:t>40</a:t>
                       </a:r>
@@ -42480,9 +42455,9 @@
                         <a:solidFill>
                           <a:schemeClr val="dk1"/>
                         </a:solidFill>
-                        <a:latin typeface="Hanken Grotesk"/>
+                        <a:latin typeface="Arial"/>
                         <a:ea typeface="Hanken Grotesk"/>
-                        <a:cs typeface="Hanken Grotesk"/>
+                        <a:cs typeface="Arial"/>
                         <a:sym typeface="Hanken Grotesk"/>
                       </a:endParaRPr>
                     </a:p>
@@ -42550,13 +42525,13 @@
                         </a:spcAft>
                         <a:buNone/>
                       </a:pPr>
-                      <a:endParaRPr lang="en" sz="1000" b="1">
+                      <a:endParaRPr lang="en" sz="1000" b="0">
                         <a:solidFill>
                           <a:schemeClr val="dk1"/>
                         </a:solidFill>
-                        <a:latin typeface="Hanken Grotesk"/>
+                        <a:latin typeface="Arial"/>
                         <a:ea typeface="Hanken Grotesk"/>
-                        <a:cs typeface="Hanken Grotesk"/>
+                        <a:cs typeface="Arial"/>
                         <a:sym typeface="Hanken Grotesk"/>
                       </a:endParaRPr>
                     </a:p>
@@ -42621,9 +42596,9 @@
                         <a:solidFill>
                           <a:schemeClr val="dk1"/>
                         </a:solidFill>
-                        <a:latin typeface="Hanken Grotesk"/>
+                        <a:latin typeface="Arial"/>
                         <a:ea typeface="Hanken Grotesk"/>
-                        <a:cs typeface="Hanken Grotesk"/>
+                        <a:cs typeface="Arial"/>
                         <a:sym typeface="Hanken Grotesk"/>
                       </a:endParaRPr>
                     </a:p>
@@ -42688,9 +42663,9 @@
                         <a:solidFill>
                           <a:schemeClr val="dk1"/>
                         </a:solidFill>
-                        <a:latin typeface="Hanken Grotesk"/>
+                        <a:latin typeface="Arial"/>
                         <a:ea typeface="Hanken Grotesk"/>
-                        <a:cs typeface="Hanken Grotesk"/>
+                        <a:cs typeface="Arial"/>
                         <a:sym typeface="Hanken Grotesk"/>
                       </a:endParaRPr>
                     </a:p>
@@ -42755,9 +42730,9 @@
                         <a:solidFill>
                           <a:schemeClr val="dk1"/>
                         </a:solidFill>
-                        <a:latin typeface="Hanken Grotesk"/>
+                        <a:latin typeface="Arial"/>
                         <a:ea typeface="Hanken Grotesk"/>
-                        <a:cs typeface="Hanken Grotesk"/>
+                        <a:cs typeface="Arial"/>
                         <a:sym typeface="Hanken Grotesk"/>
                       </a:endParaRPr>
                     </a:p>
@@ -42825,13 +42800,13 @@
                         </a:spcAft>
                         <a:buNone/>
                       </a:pPr>
-                      <a:endParaRPr lang="en" sz="1000" b="1">
+                      <a:endParaRPr lang="en" sz="1000" b="0">
                         <a:solidFill>
                           <a:schemeClr val="dk1"/>
                         </a:solidFill>
-                        <a:latin typeface="Hanken Grotesk"/>
+                        <a:latin typeface="Arial"/>
                         <a:ea typeface="Hanken Grotesk"/>
-                        <a:cs typeface="Hanken Grotesk"/>
+                        <a:cs typeface="Arial"/>
                         <a:sym typeface="Hanken Grotesk"/>
                       </a:endParaRPr>
                     </a:p>
@@ -42896,9 +42871,9 @@
                         <a:solidFill>
                           <a:schemeClr val="dk1"/>
                         </a:solidFill>
-                        <a:latin typeface="Hanken Grotesk"/>
+                        <a:latin typeface="Arial"/>
                         <a:ea typeface="Hanken Grotesk"/>
-                        <a:cs typeface="Hanken Grotesk"/>
+                        <a:cs typeface="Arial"/>
                         <a:sym typeface="Hanken Grotesk"/>
                       </a:endParaRPr>
                     </a:p>
@@ -42963,9 +42938,9 @@
                         <a:solidFill>
                           <a:schemeClr val="dk1"/>
                         </a:solidFill>
-                        <a:latin typeface="Hanken Grotesk"/>
+                        <a:latin typeface="Arial"/>
                         <a:ea typeface="Hanken Grotesk"/>
-                        <a:cs typeface="Hanken Grotesk"/>
+                        <a:cs typeface="Arial"/>
                         <a:sym typeface="Hanken Grotesk"/>
                       </a:endParaRPr>
                     </a:p>
@@ -43030,9 +43005,9 @@
                         <a:solidFill>
                           <a:schemeClr val="dk1"/>
                         </a:solidFill>
-                        <a:latin typeface="Hanken Grotesk"/>
+                        <a:latin typeface="Arial"/>
                         <a:ea typeface="Hanken Grotesk"/>
-                        <a:cs typeface="Hanken Grotesk"/>
+                        <a:cs typeface="Arial"/>
                         <a:sym typeface="Hanken Grotesk"/>
                       </a:endParaRPr>
                     </a:p>
@@ -43100,13 +43075,13 @@
                         </a:spcAft>
                         <a:buNone/>
                       </a:pPr>
-                      <a:endParaRPr lang="en" sz="1000" b="1">
+                      <a:endParaRPr lang="en" sz="1000" b="0">
                         <a:solidFill>
                           <a:schemeClr val="dk1"/>
                         </a:solidFill>
-                        <a:latin typeface="Hanken Grotesk"/>
+                        <a:latin typeface="Arial"/>
                         <a:ea typeface="Hanken Grotesk"/>
-                        <a:cs typeface="Hanken Grotesk"/>
+                        <a:cs typeface="Arial"/>
                         <a:sym typeface="Hanken Grotesk"/>
                       </a:endParaRPr>
                     </a:p>
@@ -43171,9 +43146,9 @@
                         <a:solidFill>
                           <a:schemeClr val="dk1"/>
                         </a:solidFill>
-                        <a:latin typeface="Hanken Grotesk"/>
+                        <a:latin typeface="Arial"/>
                         <a:ea typeface="Hanken Grotesk"/>
-                        <a:cs typeface="Hanken Grotesk"/>
+                        <a:cs typeface="Arial"/>
                         <a:sym typeface="Hanken Grotesk"/>
                       </a:endParaRPr>
                     </a:p>
@@ -43238,9 +43213,9 @@
                         <a:solidFill>
                           <a:schemeClr val="dk1"/>
                         </a:solidFill>
-                        <a:latin typeface="Hanken Grotesk"/>
+                        <a:latin typeface="Arial"/>
                         <a:ea typeface="Hanken Grotesk"/>
-                        <a:cs typeface="Hanken Grotesk"/>
+                        <a:cs typeface="Arial"/>
                         <a:sym typeface="Hanken Grotesk"/>
                       </a:endParaRPr>
                     </a:p>
@@ -43305,9 +43280,9 @@
                         <a:solidFill>
                           <a:schemeClr val="dk1"/>
                         </a:solidFill>
-                        <a:latin typeface="Hanken Grotesk"/>
+                        <a:latin typeface="Arial"/>
                         <a:ea typeface="Hanken Grotesk"/>
-                        <a:cs typeface="Hanken Grotesk"/>
+                        <a:cs typeface="Arial"/>
                         <a:sym typeface="Hanken Grotesk"/>
                       </a:endParaRPr>
                     </a:p>
@@ -43375,13 +43350,13 @@
                         </a:spcAft>
                         <a:buNone/>
                       </a:pPr>
-                      <a:endParaRPr lang="en" sz="1000" b="1">
+                      <a:endParaRPr lang="en" sz="1000" b="0">
                         <a:solidFill>
                           <a:schemeClr val="dk1"/>
                         </a:solidFill>
-                        <a:latin typeface="Hanken Grotesk"/>
+                        <a:latin typeface="Arial"/>
                         <a:ea typeface="Hanken Grotesk"/>
-                        <a:cs typeface="Hanken Grotesk"/>
+                        <a:cs typeface="Arial"/>
                         <a:sym typeface="Hanken Grotesk"/>
                       </a:endParaRPr>
                     </a:p>
@@ -43446,9 +43421,9 @@
                         <a:solidFill>
                           <a:schemeClr val="dk1"/>
                         </a:solidFill>
-                        <a:latin typeface="Hanken Grotesk"/>
+                        <a:latin typeface="Arial"/>
                         <a:ea typeface="Hanken Grotesk"/>
-                        <a:cs typeface="Hanken Grotesk"/>
+                        <a:cs typeface="Arial"/>
                         <a:sym typeface="Hanken Grotesk"/>
                       </a:endParaRPr>
                     </a:p>
@@ -43513,9 +43488,9 @@
                         <a:solidFill>
                           <a:schemeClr val="dk1"/>
                         </a:solidFill>
-                        <a:latin typeface="Hanken Grotesk"/>
+                        <a:latin typeface="Arial"/>
                         <a:ea typeface="Hanken Grotesk"/>
-                        <a:cs typeface="Hanken Grotesk"/>
+                        <a:cs typeface="Arial"/>
                         <a:sym typeface="Hanken Grotesk"/>
                       </a:endParaRPr>
                     </a:p>
@@ -43580,9 +43555,9 @@
                         <a:solidFill>
                           <a:schemeClr val="dk1"/>
                         </a:solidFill>
-                        <a:latin typeface="Hanken Grotesk"/>
+                        <a:latin typeface="Arial"/>
                         <a:ea typeface="Hanken Grotesk"/>
-                        <a:cs typeface="Hanken Grotesk"/>
+                        <a:cs typeface="Arial"/>
                         <a:sym typeface="Hanken Grotesk"/>
                       </a:endParaRPr>
                     </a:p>
@@ -43650,13 +43625,13 @@
                         </a:spcAft>
                         <a:buNone/>
                       </a:pPr>
-                      <a:endParaRPr lang="en" sz="1000" b="1">
+                      <a:endParaRPr lang="en" sz="1000" b="0">
                         <a:solidFill>
                           <a:schemeClr val="dk1"/>
                         </a:solidFill>
-                        <a:latin typeface="Hanken Grotesk"/>
+                        <a:latin typeface="Arial"/>
                         <a:ea typeface="Hanken Grotesk"/>
-                        <a:cs typeface="Hanken Grotesk"/>
+                        <a:cs typeface="Arial"/>
                         <a:sym typeface="Hanken Grotesk"/>
                       </a:endParaRPr>
                     </a:p>
@@ -43721,9 +43696,9 @@
                         <a:solidFill>
                           <a:schemeClr val="dk1"/>
                         </a:solidFill>
-                        <a:latin typeface="Hanken Grotesk"/>
+                        <a:latin typeface="Arial"/>
                         <a:ea typeface="Hanken Grotesk"/>
-                        <a:cs typeface="Hanken Grotesk"/>
+                        <a:cs typeface="Arial"/>
                         <a:sym typeface="Hanken Grotesk"/>
                       </a:endParaRPr>
                     </a:p>
@@ -43788,9 +43763,9 @@
                         <a:solidFill>
                           <a:schemeClr val="dk1"/>
                         </a:solidFill>
-                        <a:latin typeface="Hanken Grotesk"/>
+                        <a:latin typeface="Arial"/>
                         <a:ea typeface="Hanken Grotesk"/>
-                        <a:cs typeface="Hanken Grotesk"/>
+                        <a:cs typeface="Arial"/>
                         <a:sym typeface="Hanken Grotesk"/>
                       </a:endParaRPr>
                     </a:p>
@@ -43855,9 +43830,9 @@
                         <a:solidFill>
                           <a:schemeClr val="dk1"/>
                         </a:solidFill>
-                        <a:latin typeface="Hanken Grotesk"/>
+                        <a:latin typeface="Arial"/>
                         <a:ea typeface="Hanken Grotesk"/>
-                        <a:cs typeface="Hanken Grotesk"/>
+                        <a:cs typeface="Arial"/>
                         <a:sym typeface="Hanken Grotesk"/>
                       </a:endParaRPr>
                     </a:p>
@@ -43929,9 +43904,9 @@
                         <a:solidFill>
                           <a:schemeClr val="dk1"/>
                         </a:solidFill>
-                        <a:latin typeface="Hanken Grotesk"/>
+                        <a:latin typeface="Arial"/>
                         <a:ea typeface="Hanken Grotesk"/>
-                        <a:cs typeface="Hanken Grotesk"/>
+                        <a:cs typeface="Arial"/>
                         <a:sym typeface="Hanken Grotesk"/>
                       </a:endParaRPr>
                     </a:p>
@@ -43996,9 +43971,9 @@
                         <a:solidFill>
                           <a:schemeClr val="dk1"/>
                         </a:solidFill>
-                        <a:latin typeface="Hanken Grotesk"/>
+                        <a:latin typeface="Arial"/>
                         <a:ea typeface="Hanken Grotesk"/>
-                        <a:cs typeface="Hanken Grotesk"/>
+                        <a:cs typeface="Arial"/>
                         <a:sym typeface="Hanken Grotesk"/>
                       </a:endParaRPr>
                     </a:p>
@@ -44063,9 +44038,9 @@
                         <a:solidFill>
                           <a:schemeClr val="dk1"/>
                         </a:solidFill>
-                        <a:latin typeface="Hanken Grotesk"/>
+                        <a:latin typeface="Arial"/>
                         <a:ea typeface="Hanken Grotesk"/>
-                        <a:cs typeface="Hanken Grotesk"/>
+                        <a:cs typeface="Arial"/>
                         <a:sym typeface="Hanken Grotesk"/>
                       </a:endParaRPr>
                     </a:p>
@@ -44130,9 +44105,9 @@
                         <a:solidFill>
                           <a:schemeClr val="dk1"/>
                         </a:solidFill>
-                        <a:latin typeface="Hanken Grotesk"/>
+                        <a:latin typeface="Arial"/>
                         <a:ea typeface="Hanken Grotesk"/>
-                        <a:cs typeface="Hanken Grotesk"/>
+                        <a:cs typeface="Arial"/>
                         <a:sym typeface="Hanken Grotesk"/>
                       </a:endParaRPr>
                     </a:p>
@@ -44200,13 +44175,13 @@
                         </a:spcAft>
                         <a:buNone/>
                       </a:pPr>
-                      <a:endParaRPr lang="en" sz="1000" b="1">
+                      <a:endParaRPr lang="en" sz="1000" b="0">
                         <a:solidFill>
                           <a:schemeClr val="dk1"/>
                         </a:solidFill>
-                        <a:latin typeface="Hanken Grotesk"/>
+                        <a:latin typeface="Arial"/>
                         <a:ea typeface="Hanken Grotesk"/>
-                        <a:cs typeface="Hanken Grotesk"/>
+                        <a:cs typeface="Arial"/>
                         <a:sym typeface="Hanken Grotesk"/>
                       </a:endParaRPr>
                     </a:p>
@@ -44271,9 +44246,9 @@
                         <a:solidFill>
                           <a:schemeClr val="dk1"/>
                         </a:solidFill>
-                        <a:latin typeface="Hanken Grotesk"/>
+                        <a:latin typeface="Arial"/>
                         <a:ea typeface="Hanken Grotesk"/>
-                        <a:cs typeface="Hanken Grotesk"/>
+                        <a:cs typeface="Arial"/>
                         <a:sym typeface="Hanken Grotesk"/>
                       </a:endParaRPr>
                     </a:p>
@@ -44338,9 +44313,9 @@
                         <a:solidFill>
                           <a:schemeClr val="dk1"/>
                         </a:solidFill>
-                        <a:latin typeface="Hanken Grotesk"/>
+                        <a:latin typeface="Arial"/>
                         <a:ea typeface="Hanken Grotesk"/>
-                        <a:cs typeface="Hanken Grotesk"/>
+                        <a:cs typeface="Arial"/>
                         <a:sym typeface="Hanken Grotesk"/>
                       </a:endParaRPr>
                     </a:p>
@@ -44405,9 +44380,9 @@
                         <a:solidFill>
                           <a:schemeClr val="dk1"/>
                         </a:solidFill>
-                        <a:latin typeface="Hanken Grotesk"/>
+                        <a:latin typeface="Arial"/>
                         <a:ea typeface="Hanken Grotesk"/>
-                        <a:cs typeface="Hanken Grotesk"/>
+                        <a:cs typeface="Arial"/>
                         <a:sym typeface="Hanken Grotesk"/>
                       </a:endParaRPr>
                     </a:p>
@@ -44731,25 +44706,20 @@
               <a:buNone/>
             </a:pPr>
             <a:r>
-              <a:rPr lang="en" sz="1700">
+              <a:rPr lang="en" sz="1700" b="1">
                 <a:solidFill>
                   <a:schemeClr val="lt1"/>
                 </a:solidFill>
-                <a:latin typeface="Raleway ExtraBold"/>
                 <a:ea typeface="Raleway ExtraBold"/>
-                <a:cs typeface="Raleway ExtraBold"/>
                 <a:sym typeface="Raleway ExtraBold"/>
               </a:rPr>
               <a:t>$4,000,000</a:t>
             </a:r>
-            <a:endParaRPr sz="1700">
+            <a:endParaRPr lang="ru-RU" sz="1700">
               <a:solidFill>
                 <a:schemeClr val="lt1"/>
               </a:solidFill>
-              <a:latin typeface="Raleway ExtraBold"/>
               <a:ea typeface="Raleway ExtraBold"/>
-              <a:cs typeface="Raleway ExtraBold"/>
-              <a:sym typeface="Raleway ExtraBold"/>
             </a:endParaRPr>
           </a:p>
         </p:txBody>
@@ -45021,25 +44991,20 @@
               <a:buNone/>
             </a:pPr>
             <a:r>
-              <a:rPr lang="en" sz="1700">
+              <a:rPr lang="en" sz="1700" b="1">
                 <a:solidFill>
                   <a:schemeClr val="lt1"/>
                 </a:solidFill>
-                <a:latin typeface="Raleway ExtraBold"/>
                 <a:ea typeface="Raleway ExtraBold"/>
-                <a:cs typeface="Raleway ExtraBold"/>
                 <a:sym typeface="Raleway ExtraBold"/>
               </a:rPr>
               <a:t>$100,000</a:t>
             </a:r>
-            <a:endParaRPr sz="1700">
+            <a:endParaRPr lang="ru-RU" sz="1700" b="1">
               <a:solidFill>
                 <a:schemeClr val="lt1"/>
               </a:solidFill>
-              <a:latin typeface="Raleway ExtraBold"/>
               <a:ea typeface="Raleway ExtraBold"/>
-              <a:cs typeface="Raleway ExtraBold"/>
-              <a:sym typeface="Raleway ExtraBold"/>
             </a:endParaRPr>
           </a:p>
         </p:txBody>
@@ -45311,25 +45276,20 @@
               <a:buNone/>
             </a:pPr>
             <a:r>
-              <a:rPr lang="en" sz="1700">
+              <a:rPr lang="en" sz="1700" b="1">
                 <a:solidFill>
                   <a:schemeClr val="lt1"/>
                 </a:solidFill>
-                <a:latin typeface="Raleway ExtraBold"/>
                 <a:ea typeface="Raleway ExtraBold"/>
-                <a:cs typeface="Raleway ExtraBold"/>
                 <a:sym typeface="Raleway ExtraBold"/>
               </a:rPr>
               <a:t>$5,000</a:t>
             </a:r>
-            <a:endParaRPr sz="1700">
+            <a:endParaRPr lang="ru-RU" sz="1700" b="1">
               <a:solidFill>
                 <a:schemeClr val="lt1"/>
               </a:solidFill>
-              <a:latin typeface="Raleway ExtraBold"/>
               <a:ea typeface="Raleway ExtraBold"/>
-              <a:cs typeface="Raleway ExtraBold"/>
-              <a:sym typeface="Raleway ExtraBold"/>
             </a:endParaRPr>
           </a:p>
         </p:txBody>
@@ -45601,9 +45561,7 @@
                 <a:solidFill>
                   <a:schemeClr val="dk1"/>
                 </a:solidFill>
-                <a:latin typeface="Hanken Grotesk"/>
                 <a:ea typeface="Hanken Grotesk"/>
-                <a:cs typeface="Hanken Grotesk"/>
                 <a:sym typeface="Hanken Grotesk"/>
               </a:rPr>
               <a:t>Выручка</a:t>
@@ -45612,9 +45570,7 @@
               <a:solidFill>
                 <a:schemeClr val="dk1"/>
               </a:solidFill>
-              <a:latin typeface="Hanken Grotesk"/>
               <a:ea typeface="Hanken Grotesk"/>
-              <a:cs typeface="Hanken Grotesk"/>
             </a:endParaRPr>
           </a:p>
         </p:txBody>
@@ -45878,12 +45834,16 @@
                 <a:solidFill>
                   <a:schemeClr val="dk1"/>
                 </a:solidFill>
-                <a:latin typeface="Hanken Grotesk"/>
                 <a:ea typeface="Hanken Grotesk"/>
-                <a:cs typeface="Hanken Grotesk"/>
               </a:rPr>
               <a:t>Общие затраты</a:t>
             </a:r>
+            <a:endParaRPr lang="en" sz="1200">
+              <a:solidFill>
+                <a:schemeClr val="dk1"/>
+              </a:solidFill>
+              <a:ea typeface="Hanken Grotesk"/>
+            </a:endParaRPr>
           </a:p>
         </p:txBody>
       </p:sp>
@@ -46154,12 +46114,16 @@
                 <a:solidFill>
                   <a:schemeClr val="dk1"/>
                 </a:solidFill>
-                <a:latin typeface="Hanken Grotesk"/>
                 <a:ea typeface="Hanken Grotesk"/>
-                <a:cs typeface="Hanken Grotesk"/>
               </a:rPr>
               <a:t>Прибыль</a:t>
             </a:r>
+            <a:endParaRPr lang="en" sz="1200">
+              <a:solidFill>
+                <a:schemeClr val="dk1"/>
+              </a:solidFill>
+              <a:ea typeface="Hanken Grotesk"/>
+            </a:endParaRPr>
           </a:p>
         </p:txBody>
       </p:sp>

--- a/slides/slide_16.pptx
+++ b/slides/slide_16.pptx
@@ -861,7 +861,7 @@
           <a:bodyPr/>
           <a:lstStyle/>
           <a:p>
-            <a:fld id="{54FFD863-1413-4FF1-B4F2-B83989DA28E8}" type="datetimeFigureOut">
+            <a:fld id="{912FBD14-AB64-4282-AD6E-28DE8D79ADD1}" type="datetimeFigureOut">
               <a:rPr lang="en-US" smtClean="0"/>
               <a:t>11/7/2009</a:t>
             </a:fld>
@@ -1025,7 +1025,7 @@
           <a:bodyPr/>
           <a:lstStyle/>
           <a:p>
-            <a:fld id="{6F234F78-F343-4A13-9747-0648824B1228}" type="datetimeFigureOut">
+            <a:fld id="{1256DB91-DF68-4532-9013-A77518EAE67E}" type="datetimeFigureOut">
               <a:rPr lang="en-US" smtClean="0"/>
               <a:t>11/7/2009</a:t>
             </a:fld>
@@ -1189,7 +1189,7 @@
           <a:bodyPr/>
           <a:lstStyle/>
           <a:p>
-            <a:fld id="{370DBA32-05DA-4235-B49C-18C0D64E7DF2}" type="datetimeFigureOut">
+            <a:fld id="{22C5EA98-EA89-4B64-B154-38B1723F12CF}" type="datetimeFigureOut">
               <a:rPr lang="en-US" smtClean="0"/>
               <a:t>11/7/2009</a:t>
             </a:fld>
@@ -13094,7 +13094,7 @@
           <a:bodyPr/>
           <a:lstStyle/>
           <a:p>
-            <a:fld id="{2B51AF16-CE20-4B9A-9C9E-04169F777C48}" type="datetimeFigureOut">
+            <a:fld id="{EE66EC48-A0F4-4062-9F03-96CFB1519DB1}" type="datetimeFigureOut">
               <a:rPr lang="en-US" smtClean="0"/>
               <a:t>11/7/2009</a:t>
             </a:fld>
@@ -33195,7 +33195,7 @@
           <a:bodyPr/>
           <a:lstStyle/>
           <a:p>
-            <a:fld id="{58BEEA77-8571-4FCB-A992-7E38676C915E}" type="datetimeFigureOut">
+            <a:fld id="{615E2C67-0943-49B3-AE80-3DD19604B899}" type="datetimeFigureOut">
               <a:rPr lang="en-US" smtClean="0"/>
               <a:t>11/7/2009</a:t>
             </a:fld>
@@ -38842,7 +38842,7 @@
           <a:bodyPr/>
           <a:lstStyle/>
           <a:p>
-            <a:fld id="{8E242F21-76DD-44B0-A1B6-0360ABDBEED7}" type="datetimeFigureOut">
+            <a:fld id="{1CDCADC3-75C0-4C30-AC1F-6F6E1B598AD5}" type="datetimeFigureOut">
               <a:rPr lang="en-US" smtClean="0"/>
               <a:t>11/7/2009</a:t>
             </a:fld>
@@ -39231,7 +39231,7 @@
           <a:bodyPr/>
           <a:lstStyle/>
           <a:p>
-            <a:fld id="{1B949960-71A0-4486-ADAA-758D3819141F}" type="datetimeFigureOut">
+            <a:fld id="{408A87FC-7041-4E07-B16D-C541D69857F5}" type="datetimeFigureOut">
               <a:rPr lang="en-US" smtClean="0"/>
               <a:t>11/7/2009</a:t>
             </a:fld>
@@ -39344,7 +39344,7 @@
           <a:bodyPr/>
           <a:lstStyle/>
           <a:p>
-            <a:fld id="{3F295610-7C31-4308-9926-3A03909F8C25}" type="datetimeFigureOut">
+            <a:fld id="{058ED2A7-D223-499C-BF5C-03C7A8290343}" type="datetimeFigureOut">
               <a:rPr lang="en-US" smtClean="0"/>
               <a:t>11/7/2009</a:t>
             </a:fld>
@@ -39434,7 +39434,7 @@
           <a:bodyPr/>
           <a:lstStyle/>
           <a:p>
-            <a:fld id="{9800A927-B10C-4C7F-B179-E47CEC902D7A}" type="datetimeFigureOut">
+            <a:fld id="{B035F619-AE9A-4DD2-8D67-1398E7258899}" type="datetimeFigureOut">
               <a:rPr lang="en-US" smtClean="0"/>
               <a:t>11/7/2009</a:t>
             </a:fld>
@@ -39689,7 +39689,7 @@
           <a:bodyPr/>
           <a:lstStyle/>
           <a:p>
-            <a:fld id="{70B37EB3-2A26-4DCB-9270-08D740659187}" type="datetimeFigureOut">
+            <a:fld id="{974CF61D-D227-419C-BF6C-6FD8CADA2EB9}" type="datetimeFigureOut">
               <a:rPr lang="en-US" smtClean="0"/>
               <a:t>11/7/2009</a:t>
             </a:fld>
@@ -39921,7 +39921,7 @@
           <a:bodyPr/>
           <a:lstStyle/>
           <a:p>
-            <a:fld id="{6B6B10A9-43C2-4106-9DF7-FADF2648FE02}" type="datetimeFigureOut">
+            <a:fld id="{1401D4E0-73B6-4366-A58D-9C9EAC0F73AB}" type="datetimeFigureOut">
               <a:rPr lang="en-US" smtClean="0"/>
               <a:t>11/7/2009</a:t>
             </a:fld>
